--- a/public/videos/repositories/space-map/space-map-tech-preview.pptx
+++ b/public/videos/repositories/space-map/space-map-tech-preview.pptx
@@ -134,7 +134,7 @@
           <p:cNvPr id="2" name="タイトル 1">
             <a:extLst>
               <a:ext uri="{FF2B5EF4-FFF2-40B4-BE49-F238E27FC236}">
-                <a16:creationId xmlns:a16="http://schemas.microsoft.com/office/drawing/2014/main" id="{51446910-88E2-4968-AD50-9DDBFA3460B6}"/>
+                <a16:creationId xmlns:a16="http://schemas.microsoft.com/office/drawing/2014/main" id="{E3C4DCB4-1AD0-DE74-8053-357BC237BD4F}"/>
               </a:ext>
             </a:extLst>
           </p:cNvPr>
@@ -171,7 +171,7 @@
           <p:cNvPr id="3" name="字幕 2">
             <a:extLst>
               <a:ext uri="{FF2B5EF4-FFF2-40B4-BE49-F238E27FC236}">
-                <a16:creationId xmlns:a16="http://schemas.microsoft.com/office/drawing/2014/main" id="{DE0414DE-891A-936A-06A7-B3A3B87A3559}"/>
+                <a16:creationId xmlns:a16="http://schemas.microsoft.com/office/drawing/2014/main" id="{CAEC8646-A2D2-63DB-BF44-0E6F6DE3C4BF}"/>
               </a:ext>
             </a:extLst>
           </p:cNvPr>
@@ -241,7 +241,7 @@
           <p:cNvPr id="4" name="日付プレースホルダー 3">
             <a:extLst>
               <a:ext uri="{FF2B5EF4-FFF2-40B4-BE49-F238E27FC236}">
-                <a16:creationId xmlns:a16="http://schemas.microsoft.com/office/drawing/2014/main" id="{6876447F-C14E-083C-7F0B-98835A47418C}"/>
+                <a16:creationId xmlns:a16="http://schemas.microsoft.com/office/drawing/2014/main" id="{D444A9F4-4131-4721-C9D1-CB320F953484}"/>
               </a:ext>
             </a:extLst>
           </p:cNvPr>
@@ -257,7 +257,7 @@
           <a:bodyPr/>
           <a:lstStyle/>
           <a:p>
-            <a:fld id="{794A3558-7951-4BA0-88B3-EADFCA56266D}" type="datetimeFigureOut">
+            <a:fld id="{4332AD03-1C48-40E9-888F-4BAB1BDD10B1}" type="datetimeFigureOut">
               <a:rPr kumimoji="1" lang="ja-JP" altLang="en-US" smtClean="0"/>
               <a:t>2026/7/30</a:t>
             </a:fld>
@@ -270,7 +270,7 @@
           <p:cNvPr id="5" name="フッター プレースホルダー 4">
             <a:extLst>
               <a:ext uri="{FF2B5EF4-FFF2-40B4-BE49-F238E27FC236}">
-                <a16:creationId xmlns:a16="http://schemas.microsoft.com/office/drawing/2014/main" id="{8C119BF6-9014-4D55-0FC1-120A55815B7F}"/>
+                <a16:creationId xmlns:a16="http://schemas.microsoft.com/office/drawing/2014/main" id="{DAAE6468-4E84-E604-F0F5-E9869D010C57}"/>
               </a:ext>
             </a:extLst>
           </p:cNvPr>
@@ -295,7 +295,7 @@
           <p:cNvPr id="6" name="スライド番号プレースホルダー 5">
             <a:extLst>
               <a:ext uri="{FF2B5EF4-FFF2-40B4-BE49-F238E27FC236}">
-                <a16:creationId xmlns:a16="http://schemas.microsoft.com/office/drawing/2014/main" id="{58507D4C-BC5A-F4D7-6932-DA410BD1D6E3}"/>
+                <a16:creationId xmlns:a16="http://schemas.microsoft.com/office/drawing/2014/main" id="{D462CD4B-3D43-32CA-62CE-4A86ABC6F3BC}"/>
               </a:ext>
             </a:extLst>
           </p:cNvPr>
@@ -311,7 +311,7 @@
           <a:bodyPr/>
           <a:lstStyle/>
           <a:p>
-            <a:fld id="{D2A9B455-F022-4DCD-AB19-4AE8DFF281BB}" type="slidenum">
+            <a:fld id="{E87B2B7F-83D0-4B6E-A23A-67B351E85F50}" type="slidenum">
               <a:rPr kumimoji="1" lang="ja-JP" altLang="en-US" smtClean="0"/>
               <a:t>‹#›</a:t>
             </a:fld>
@@ -322,7 +322,7 @@
     </p:spTree>
     <p:extLst>
       <p:ext uri="{BB962C8B-B14F-4D97-AF65-F5344CB8AC3E}">
-        <p14:creationId xmlns:p14="http://schemas.microsoft.com/office/powerpoint/2010/main" val="1818598650"/>
+        <p14:creationId xmlns:p14="http://schemas.microsoft.com/office/powerpoint/2010/main" val="2354221762"/>
       </p:ext>
     </p:extLst>
   </p:cSld>
@@ -354,7 +354,7 @@
           <p:cNvPr id="2" name="タイトル 1">
             <a:extLst>
               <a:ext uri="{FF2B5EF4-FFF2-40B4-BE49-F238E27FC236}">
-                <a16:creationId xmlns:a16="http://schemas.microsoft.com/office/drawing/2014/main" id="{A78BBE77-E880-7CD0-7490-B2AAE5BDF242}"/>
+                <a16:creationId xmlns:a16="http://schemas.microsoft.com/office/drawing/2014/main" id="{AE8C8B10-10CA-E7E9-F4BE-E2972BB6A56D}"/>
               </a:ext>
             </a:extLst>
           </p:cNvPr>
@@ -382,7 +382,7 @@
           <p:cNvPr id="3" name="縦書きテキスト プレースホルダー 2">
             <a:extLst>
               <a:ext uri="{FF2B5EF4-FFF2-40B4-BE49-F238E27FC236}">
-                <a16:creationId xmlns:a16="http://schemas.microsoft.com/office/drawing/2014/main" id="{C156B72B-531B-8DFA-7012-0587C855A863}"/>
+                <a16:creationId xmlns:a16="http://schemas.microsoft.com/office/drawing/2014/main" id="{10DA5D1F-2B76-CBF7-A26E-FBA566C5EF9E}"/>
               </a:ext>
             </a:extLst>
           </p:cNvPr>
@@ -471,7 +471,7 @@
           <p:cNvPr id="4" name="日付プレースホルダー 3">
             <a:extLst>
               <a:ext uri="{FF2B5EF4-FFF2-40B4-BE49-F238E27FC236}">
-                <a16:creationId xmlns:a16="http://schemas.microsoft.com/office/drawing/2014/main" id="{FF69E1FE-FE8F-C1C2-45BB-E704E799ABFC}"/>
+                <a16:creationId xmlns:a16="http://schemas.microsoft.com/office/drawing/2014/main" id="{235EB96C-0909-DD10-536D-AAAE24D74427}"/>
               </a:ext>
             </a:extLst>
           </p:cNvPr>
@@ -487,7 +487,7 @@
           <a:bodyPr/>
           <a:lstStyle/>
           <a:p>
-            <a:fld id="{794A3558-7951-4BA0-88B3-EADFCA56266D}" type="datetimeFigureOut">
+            <a:fld id="{4332AD03-1C48-40E9-888F-4BAB1BDD10B1}" type="datetimeFigureOut">
               <a:rPr kumimoji="1" lang="ja-JP" altLang="en-US" smtClean="0"/>
               <a:t>2026/7/30</a:t>
             </a:fld>
@@ -500,7 +500,7 @@
           <p:cNvPr id="5" name="フッター プレースホルダー 4">
             <a:extLst>
               <a:ext uri="{FF2B5EF4-FFF2-40B4-BE49-F238E27FC236}">
-                <a16:creationId xmlns:a16="http://schemas.microsoft.com/office/drawing/2014/main" id="{0C94EEE6-136F-FBEF-D65D-BD02F1C09DD1}"/>
+                <a16:creationId xmlns:a16="http://schemas.microsoft.com/office/drawing/2014/main" id="{CB8EC0DE-D45A-AF62-2D51-14625DE3D83F}"/>
               </a:ext>
             </a:extLst>
           </p:cNvPr>
@@ -525,7 +525,7 @@
           <p:cNvPr id="6" name="スライド番号プレースホルダー 5">
             <a:extLst>
               <a:ext uri="{FF2B5EF4-FFF2-40B4-BE49-F238E27FC236}">
-                <a16:creationId xmlns:a16="http://schemas.microsoft.com/office/drawing/2014/main" id="{E986F025-AEB3-7E1E-6802-4E693628BDCB}"/>
+                <a16:creationId xmlns:a16="http://schemas.microsoft.com/office/drawing/2014/main" id="{ABDC66A7-9585-C405-ECFA-ABBF47AB52D1}"/>
               </a:ext>
             </a:extLst>
           </p:cNvPr>
@@ -541,7 +541,7 @@
           <a:bodyPr/>
           <a:lstStyle/>
           <a:p>
-            <a:fld id="{D2A9B455-F022-4DCD-AB19-4AE8DFF281BB}" type="slidenum">
+            <a:fld id="{E87B2B7F-83D0-4B6E-A23A-67B351E85F50}" type="slidenum">
               <a:rPr kumimoji="1" lang="ja-JP" altLang="en-US" smtClean="0"/>
               <a:t>‹#›</a:t>
             </a:fld>
@@ -552,7 +552,7 @@
     </p:spTree>
     <p:extLst>
       <p:ext uri="{BB962C8B-B14F-4D97-AF65-F5344CB8AC3E}">
-        <p14:creationId xmlns:p14="http://schemas.microsoft.com/office/powerpoint/2010/main" val="1079822862"/>
+        <p14:creationId xmlns:p14="http://schemas.microsoft.com/office/powerpoint/2010/main" val="3680699323"/>
       </p:ext>
     </p:extLst>
   </p:cSld>
@@ -584,7 +584,7 @@
           <p:cNvPr id="2" name="縦書きタイトル 1">
             <a:extLst>
               <a:ext uri="{FF2B5EF4-FFF2-40B4-BE49-F238E27FC236}">
-                <a16:creationId xmlns:a16="http://schemas.microsoft.com/office/drawing/2014/main" id="{665055FD-7932-74D7-05F4-7E4D542D92C2}"/>
+                <a16:creationId xmlns:a16="http://schemas.microsoft.com/office/drawing/2014/main" id="{815BECB3-510B-0DC1-F535-784C3A106B8B}"/>
               </a:ext>
             </a:extLst>
           </p:cNvPr>
@@ -617,7 +617,7 @@
           <p:cNvPr id="3" name="縦書きテキスト プレースホルダー 2">
             <a:extLst>
               <a:ext uri="{FF2B5EF4-FFF2-40B4-BE49-F238E27FC236}">
-                <a16:creationId xmlns:a16="http://schemas.microsoft.com/office/drawing/2014/main" id="{C249E4AF-2919-2DD3-94A3-27940A3CBA91}"/>
+                <a16:creationId xmlns:a16="http://schemas.microsoft.com/office/drawing/2014/main" id="{52BDC72A-1685-6508-3115-5A1744C3B508}"/>
               </a:ext>
             </a:extLst>
           </p:cNvPr>
@@ -711,7 +711,7 @@
           <p:cNvPr id="4" name="日付プレースホルダー 3">
             <a:extLst>
               <a:ext uri="{FF2B5EF4-FFF2-40B4-BE49-F238E27FC236}">
-                <a16:creationId xmlns:a16="http://schemas.microsoft.com/office/drawing/2014/main" id="{6180F04E-57E7-050A-4CCC-9CC3C6248AE0}"/>
+                <a16:creationId xmlns:a16="http://schemas.microsoft.com/office/drawing/2014/main" id="{C7EE800C-9E5E-4FD1-92CA-4091CD175480}"/>
               </a:ext>
             </a:extLst>
           </p:cNvPr>
@@ -727,7 +727,7 @@
           <a:bodyPr/>
           <a:lstStyle/>
           <a:p>
-            <a:fld id="{794A3558-7951-4BA0-88B3-EADFCA56266D}" type="datetimeFigureOut">
+            <a:fld id="{4332AD03-1C48-40E9-888F-4BAB1BDD10B1}" type="datetimeFigureOut">
               <a:rPr kumimoji="1" lang="ja-JP" altLang="en-US" smtClean="0"/>
               <a:t>2026/7/30</a:t>
             </a:fld>
@@ -740,7 +740,7 @@
           <p:cNvPr id="5" name="フッター プレースホルダー 4">
             <a:extLst>
               <a:ext uri="{FF2B5EF4-FFF2-40B4-BE49-F238E27FC236}">
-                <a16:creationId xmlns:a16="http://schemas.microsoft.com/office/drawing/2014/main" id="{7A3B7DF1-4745-3D97-FE73-53751C1C73B0}"/>
+                <a16:creationId xmlns:a16="http://schemas.microsoft.com/office/drawing/2014/main" id="{22BFABFA-E01D-1E5E-623A-3CB2ACBF5755}"/>
               </a:ext>
             </a:extLst>
           </p:cNvPr>
@@ -765,7 +765,7 @@
           <p:cNvPr id="6" name="スライド番号プレースホルダー 5">
             <a:extLst>
               <a:ext uri="{FF2B5EF4-FFF2-40B4-BE49-F238E27FC236}">
-                <a16:creationId xmlns:a16="http://schemas.microsoft.com/office/drawing/2014/main" id="{9E4B792F-0529-711C-4733-A143B8CF097A}"/>
+                <a16:creationId xmlns:a16="http://schemas.microsoft.com/office/drawing/2014/main" id="{31870531-7B61-69C1-74AC-013689EBF28B}"/>
               </a:ext>
             </a:extLst>
           </p:cNvPr>
@@ -781,7 +781,7 @@
           <a:bodyPr/>
           <a:lstStyle/>
           <a:p>
-            <a:fld id="{D2A9B455-F022-4DCD-AB19-4AE8DFF281BB}" type="slidenum">
+            <a:fld id="{E87B2B7F-83D0-4B6E-A23A-67B351E85F50}" type="slidenum">
               <a:rPr kumimoji="1" lang="ja-JP" altLang="en-US" smtClean="0"/>
               <a:t>‹#›</a:t>
             </a:fld>
@@ -792,7 +792,7 @@
     </p:spTree>
     <p:extLst>
       <p:ext uri="{BB962C8B-B14F-4D97-AF65-F5344CB8AC3E}">
-        <p14:creationId xmlns:p14="http://schemas.microsoft.com/office/powerpoint/2010/main" val="2072248872"/>
+        <p14:creationId xmlns:p14="http://schemas.microsoft.com/office/powerpoint/2010/main" val="2635868220"/>
       </p:ext>
     </p:extLst>
   </p:cSld>
@@ -824,7 +824,7 @@
           <p:cNvPr id="2" name="タイトル 1">
             <a:extLst>
               <a:ext uri="{FF2B5EF4-FFF2-40B4-BE49-F238E27FC236}">
-                <a16:creationId xmlns:a16="http://schemas.microsoft.com/office/drawing/2014/main" id="{5EA6E25E-C63A-CC04-8DA4-C260F3913941}"/>
+                <a16:creationId xmlns:a16="http://schemas.microsoft.com/office/drawing/2014/main" id="{1DE4DED7-1E0F-2930-630E-22518841D875}"/>
               </a:ext>
             </a:extLst>
           </p:cNvPr>
@@ -852,7 +852,7 @@
           <p:cNvPr id="3" name="コンテンツ プレースホルダー 2">
             <a:extLst>
               <a:ext uri="{FF2B5EF4-FFF2-40B4-BE49-F238E27FC236}">
-                <a16:creationId xmlns:a16="http://schemas.microsoft.com/office/drawing/2014/main" id="{F18F2E45-03AB-E24C-CF39-BDEF34714F1E}"/>
+                <a16:creationId xmlns:a16="http://schemas.microsoft.com/office/drawing/2014/main" id="{B75F1D59-9BED-7C0D-7CB6-864A70D6C363}"/>
               </a:ext>
             </a:extLst>
           </p:cNvPr>
@@ -941,7 +941,7 @@
           <p:cNvPr id="4" name="日付プレースホルダー 3">
             <a:extLst>
               <a:ext uri="{FF2B5EF4-FFF2-40B4-BE49-F238E27FC236}">
-                <a16:creationId xmlns:a16="http://schemas.microsoft.com/office/drawing/2014/main" id="{FCEEEC3E-3792-98A5-A779-8A18BB780D46}"/>
+                <a16:creationId xmlns:a16="http://schemas.microsoft.com/office/drawing/2014/main" id="{EFFDC03C-1199-6FD2-36E9-BE968FDD7F51}"/>
               </a:ext>
             </a:extLst>
           </p:cNvPr>
@@ -957,7 +957,7 @@
           <a:bodyPr/>
           <a:lstStyle/>
           <a:p>
-            <a:fld id="{794A3558-7951-4BA0-88B3-EADFCA56266D}" type="datetimeFigureOut">
+            <a:fld id="{4332AD03-1C48-40E9-888F-4BAB1BDD10B1}" type="datetimeFigureOut">
               <a:rPr kumimoji="1" lang="ja-JP" altLang="en-US" smtClean="0"/>
               <a:t>2026/7/30</a:t>
             </a:fld>
@@ -970,7 +970,7 @@
           <p:cNvPr id="5" name="フッター プレースホルダー 4">
             <a:extLst>
               <a:ext uri="{FF2B5EF4-FFF2-40B4-BE49-F238E27FC236}">
-                <a16:creationId xmlns:a16="http://schemas.microsoft.com/office/drawing/2014/main" id="{E8F12483-9AA7-39D7-0610-9DD434481CB2}"/>
+                <a16:creationId xmlns:a16="http://schemas.microsoft.com/office/drawing/2014/main" id="{ADFCCF65-B6ED-99A8-6173-B4D822BF2453}"/>
               </a:ext>
             </a:extLst>
           </p:cNvPr>
@@ -995,7 +995,7 @@
           <p:cNvPr id="6" name="スライド番号プレースホルダー 5">
             <a:extLst>
               <a:ext uri="{FF2B5EF4-FFF2-40B4-BE49-F238E27FC236}">
-                <a16:creationId xmlns:a16="http://schemas.microsoft.com/office/drawing/2014/main" id="{27A64FC1-6FA8-368F-3AAC-967205209597}"/>
+                <a16:creationId xmlns:a16="http://schemas.microsoft.com/office/drawing/2014/main" id="{79A473D4-4DCC-2765-D764-444A3DB486E6}"/>
               </a:ext>
             </a:extLst>
           </p:cNvPr>
@@ -1011,7 +1011,7 @@
           <a:bodyPr/>
           <a:lstStyle/>
           <a:p>
-            <a:fld id="{D2A9B455-F022-4DCD-AB19-4AE8DFF281BB}" type="slidenum">
+            <a:fld id="{E87B2B7F-83D0-4B6E-A23A-67B351E85F50}" type="slidenum">
               <a:rPr kumimoji="1" lang="ja-JP" altLang="en-US" smtClean="0"/>
               <a:t>‹#›</a:t>
             </a:fld>
@@ -1022,7 +1022,7 @@
     </p:spTree>
     <p:extLst>
       <p:ext uri="{BB962C8B-B14F-4D97-AF65-F5344CB8AC3E}">
-        <p14:creationId xmlns:p14="http://schemas.microsoft.com/office/powerpoint/2010/main" val="479353178"/>
+        <p14:creationId xmlns:p14="http://schemas.microsoft.com/office/powerpoint/2010/main" val="141193737"/>
       </p:ext>
     </p:extLst>
   </p:cSld>
@@ -1054,7 +1054,7 @@
           <p:cNvPr id="2" name="タイトル 1">
             <a:extLst>
               <a:ext uri="{FF2B5EF4-FFF2-40B4-BE49-F238E27FC236}">
-                <a16:creationId xmlns:a16="http://schemas.microsoft.com/office/drawing/2014/main" id="{5E296862-6259-E424-C09B-9D5696383535}"/>
+                <a16:creationId xmlns:a16="http://schemas.microsoft.com/office/drawing/2014/main" id="{35D37BB2-40FD-B069-7AE7-D58D58B5C61A}"/>
               </a:ext>
             </a:extLst>
           </p:cNvPr>
@@ -1091,7 +1091,7 @@
           <p:cNvPr id="3" name="テキスト プレースホルダー 2">
             <a:extLst>
               <a:ext uri="{FF2B5EF4-FFF2-40B4-BE49-F238E27FC236}">
-                <a16:creationId xmlns:a16="http://schemas.microsoft.com/office/drawing/2014/main" id="{E021DFBC-9D52-CF69-8B6F-766DE11C1A26}"/>
+                <a16:creationId xmlns:a16="http://schemas.microsoft.com/office/drawing/2014/main" id="{2F6672D8-D7E2-B2A5-84A6-3A19BFF70051}"/>
               </a:ext>
             </a:extLst>
           </p:cNvPr>
@@ -1216,7 +1216,7 @@
           <p:cNvPr id="4" name="日付プレースホルダー 3">
             <a:extLst>
               <a:ext uri="{FF2B5EF4-FFF2-40B4-BE49-F238E27FC236}">
-                <a16:creationId xmlns:a16="http://schemas.microsoft.com/office/drawing/2014/main" id="{12D37EBB-BBF9-68BE-3382-A27DE8C235FF}"/>
+                <a16:creationId xmlns:a16="http://schemas.microsoft.com/office/drawing/2014/main" id="{8FA54146-39D5-845F-063D-37ED9A8ABD35}"/>
               </a:ext>
             </a:extLst>
           </p:cNvPr>
@@ -1232,7 +1232,7 @@
           <a:bodyPr/>
           <a:lstStyle/>
           <a:p>
-            <a:fld id="{794A3558-7951-4BA0-88B3-EADFCA56266D}" type="datetimeFigureOut">
+            <a:fld id="{4332AD03-1C48-40E9-888F-4BAB1BDD10B1}" type="datetimeFigureOut">
               <a:rPr kumimoji="1" lang="ja-JP" altLang="en-US" smtClean="0"/>
               <a:t>2026/7/30</a:t>
             </a:fld>
@@ -1245,7 +1245,7 @@
           <p:cNvPr id="5" name="フッター プレースホルダー 4">
             <a:extLst>
               <a:ext uri="{FF2B5EF4-FFF2-40B4-BE49-F238E27FC236}">
-                <a16:creationId xmlns:a16="http://schemas.microsoft.com/office/drawing/2014/main" id="{2FACFCE5-7C5E-1482-B516-D53EB9B61FE4}"/>
+                <a16:creationId xmlns:a16="http://schemas.microsoft.com/office/drawing/2014/main" id="{EDE4BC64-62E8-E7AB-BCAB-65392F670F40}"/>
               </a:ext>
             </a:extLst>
           </p:cNvPr>
@@ -1270,7 +1270,7 @@
           <p:cNvPr id="6" name="スライド番号プレースホルダー 5">
             <a:extLst>
               <a:ext uri="{FF2B5EF4-FFF2-40B4-BE49-F238E27FC236}">
-                <a16:creationId xmlns:a16="http://schemas.microsoft.com/office/drawing/2014/main" id="{368000B2-D3E0-A05B-D64D-620649B73CC3}"/>
+                <a16:creationId xmlns:a16="http://schemas.microsoft.com/office/drawing/2014/main" id="{0EB07D7F-A985-9070-282A-B559D0017914}"/>
               </a:ext>
             </a:extLst>
           </p:cNvPr>
@@ -1286,7 +1286,7 @@
           <a:bodyPr/>
           <a:lstStyle/>
           <a:p>
-            <a:fld id="{D2A9B455-F022-4DCD-AB19-4AE8DFF281BB}" type="slidenum">
+            <a:fld id="{E87B2B7F-83D0-4B6E-A23A-67B351E85F50}" type="slidenum">
               <a:rPr kumimoji="1" lang="ja-JP" altLang="en-US" smtClean="0"/>
               <a:t>‹#›</a:t>
             </a:fld>
@@ -1297,7 +1297,7 @@
     </p:spTree>
     <p:extLst>
       <p:ext uri="{BB962C8B-B14F-4D97-AF65-F5344CB8AC3E}">
-        <p14:creationId xmlns:p14="http://schemas.microsoft.com/office/powerpoint/2010/main" val="2877689311"/>
+        <p14:creationId xmlns:p14="http://schemas.microsoft.com/office/powerpoint/2010/main" val="560401"/>
       </p:ext>
     </p:extLst>
   </p:cSld>
@@ -1329,7 +1329,7 @@
           <p:cNvPr id="2" name="タイトル 1">
             <a:extLst>
               <a:ext uri="{FF2B5EF4-FFF2-40B4-BE49-F238E27FC236}">
-                <a16:creationId xmlns:a16="http://schemas.microsoft.com/office/drawing/2014/main" id="{41883CBC-3023-5D03-BAD7-D20D29A8573B}"/>
+                <a16:creationId xmlns:a16="http://schemas.microsoft.com/office/drawing/2014/main" id="{BB027AC5-26A0-DB0E-5BC8-0D7CB9A2B2E6}"/>
               </a:ext>
             </a:extLst>
           </p:cNvPr>
@@ -1357,7 +1357,7 @@
           <p:cNvPr id="3" name="コンテンツ プレースホルダー 2">
             <a:extLst>
               <a:ext uri="{FF2B5EF4-FFF2-40B4-BE49-F238E27FC236}">
-                <a16:creationId xmlns:a16="http://schemas.microsoft.com/office/drawing/2014/main" id="{4D8CF116-5F4E-6A32-FF1A-87011E9BEFAD}"/>
+                <a16:creationId xmlns:a16="http://schemas.microsoft.com/office/drawing/2014/main" id="{DC5C2F3E-BA0F-0B6D-27FC-536EF4A7A189}"/>
               </a:ext>
             </a:extLst>
           </p:cNvPr>
@@ -1451,7 +1451,7 @@
           <p:cNvPr id="4" name="コンテンツ プレースホルダー 3">
             <a:extLst>
               <a:ext uri="{FF2B5EF4-FFF2-40B4-BE49-F238E27FC236}">
-                <a16:creationId xmlns:a16="http://schemas.microsoft.com/office/drawing/2014/main" id="{B8363051-B570-5717-F8C6-585903558C59}"/>
+                <a16:creationId xmlns:a16="http://schemas.microsoft.com/office/drawing/2014/main" id="{FEF9835B-3276-3AE7-19B1-08C0E1B22F50}"/>
               </a:ext>
             </a:extLst>
           </p:cNvPr>
@@ -1545,7 +1545,7 @@
           <p:cNvPr id="5" name="日付プレースホルダー 4">
             <a:extLst>
               <a:ext uri="{FF2B5EF4-FFF2-40B4-BE49-F238E27FC236}">
-                <a16:creationId xmlns:a16="http://schemas.microsoft.com/office/drawing/2014/main" id="{3B4BD653-6D0F-1005-60B4-49BF4E3273D7}"/>
+                <a16:creationId xmlns:a16="http://schemas.microsoft.com/office/drawing/2014/main" id="{DC181F59-30B0-504E-CDCA-D80DA17BCF6D}"/>
               </a:ext>
             </a:extLst>
           </p:cNvPr>
@@ -1561,7 +1561,7 @@
           <a:bodyPr/>
           <a:lstStyle/>
           <a:p>
-            <a:fld id="{794A3558-7951-4BA0-88B3-EADFCA56266D}" type="datetimeFigureOut">
+            <a:fld id="{4332AD03-1C48-40E9-888F-4BAB1BDD10B1}" type="datetimeFigureOut">
               <a:rPr kumimoji="1" lang="ja-JP" altLang="en-US" smtClean="0"/>
               <a:t>2026/7/30</a:t>
             </a:fld>
@@ -1574,7 +1574,7 @@
           <p:cNvPr id="6" name="フッター プレースホルダー 5">
             <a:extLst>
               <a:ext uri="{FF2B5EF4-FFF2-40B4-BE49-F238E27FC236}">
-                <a16:creationId xmlns:a16="http://schemas.microsoft.com/office/drawing/2014/main" id="{8594439C-6329-0C42-B2C5-418847543522}"/>
+                <a16:creationId xmlns:a16="http://schemas.microsoft.com/office/drawing/2014/main" id="{59BE61EA-3EBB-574A-4CEE-BDDDAFE2BA03}"/>
               </a:ext>
             </a:extLst>
           </p:cNvPr>
@@ -1599,7 +1599,7 @@
           <p:cNvPr id="7" name="スライド番号プレースホルダー 6">
             <a:extLst>
               <a:ext uri="{FF2B5EF4-FFF2-40B4-BE49-F238E27FC236}">
-                <a16:creationId xmlns:a16="http://schemas.microsoft.com/office/drawing/2014/main" id="{73E1D161-19FC-860E-D2EC-1FCE79674253}"/>
+                <a16:creationId xmlns:a16="http://schemas.microsoft.com/office/drawing/2014/main" id="{D37DEBF9-8DE3-157E-3E62-822736AB752E}"/>
               </a:ext>
             </a:extLst>
           </p:cNvPr>
@@ -1615,7 +1615,7 @@
           <a:bodyPr/>
           <a:lstStyle/>
           <a:p>
-            <a:fld id="{D2A9B455-F022-4DCD-AB19-4AE8DFF281BB}" type="slidenum">
+            <a:fld id="{E87B2B7F-83D0-4B6E-A23A-67B351E85F50}" type="slidenum">
               <a:rPr kumimoji="1" lang="ja-JP" altLang="en-US" smtClean="0"/>
               <a:t>‹#›</a:t>
             </a:fld>
@@ -1626,7 +1626,7 @@
     </p:spTree>
     <p:extLst>
       <p:ext uri="{BB962C8B-B14F-4D97-AF65-F5344CB8AC3E}">
-        <p14:creationId xmlns:p14="http://schemas.microsoft.com/office/powerpoint/2010/main" val="1219283131"/>
+        <p14:creationId xmlns:p14="http://schemas.microsoft.com/office/powerpoint/2010/main" val="2317108124"/>
       </p:ext>
     </p:extLst>
   </p:cSld>
@@ -1658,7 +1658,7 @@
           <p:cNvPr id="2" name="タイトル 1">
             <a:extLst>
               <a:ext uri="{FF2B5EF4-FFF2-40B4-BE49-F238E27FC236}">
-                <a16:creationId xmlns:a16="http://schemas.microsoft.com/office/drawing/2014/main" id="{9D4B2E9F-FE7B-7C4A-F6DA-CE415AC468B8}"/>
+                <a16:creationId xmlns:a16="http://schemas.microsoft.com/office/drawing/2014/main" id="{F07F2C66-3498-4606-EB30-9678F745BB90}"/>
               </a:ext>
             </a:extLst>
           </p:cNvPr>
@@ -1691,7 +1691,7 @@
           <p:cNvPr id="3" name="テキスト プレースホルダー 2">
             <a:extLst>
               <a:ext uri="{FF2B5EF4-FFF2-40B4-BE49-F238E27FC236}">
-                <a16:creationId xmlns:a16="http://schemas.microsoft.com/office/drawing/2014/main" id="{CDE9D92F-D180-49E6-DE17-E326291D5448}"/>
+                <a16:creationId xmlns:a16="http://schemas.microsoft.com/office/drawing/2014/main" id="{F37B2605-B962-DB83-0369-A2E03151A944}"/>
               </a:ext>
             </a:extLst>
           </p:cNvPr>
@@ -1762,7 +1762,7 @@
           <p:cNvPr id="4" name="コンテンツ プレースホルダー 3">
             <a:extLst>
               <a:ext uri="{FF2B5EF4-FFF2-40B4-BE49-F238E27FC236}">
-                <a16:creationId xmlns:a16="http://schemas.microsoft.com/office/drawing/2014/main" id="{09B2512D-20D0-1F6C-8011-8ECDA748391E}"/>
+                <a16:creationId xmlns:a16="http://schemas.microsoft.com/office/drawing/2014/main" id="{EDC923E2-5B47-F872-0D5D-167F81235BE3}"/>
               </a:ext>
             </a:extLst>
           </p:cNvPr>
@@ -1856,7 +1856,7 @@
           <p:cNvPr id="5" name="テキスト プレースホルダー 4">
             <a:extLst>
               <a:ext uri="{FF2B5EF4-FFF2-40B4-BE49-F238E27FC236}">
-                <a16:creationId xmlns:a16="http://schemas.microsoft.com/office/drawing/2014/main" id="{A12179F9-0345-9E9F-2635-0FA70D51C180}"/>
+                <a16:creationId xmlns:a16="http://schemas.microsoft.com/office/drawing/2014/main" id="{518CD3D7-2BA3-E749-11E0-B69D194A7159}"/>
               </a:ext>
             </a:extLst>
           </p:cNvPr>
@@ -1927,7 +1927,7 @@
           <p:cNvPr id="6" name="コンテンツ プレースホルダー 5">
             <a:extLst>
               <a:ext uri="{FF2B5EF4-FFF2-40B4-BE49-F238E27FC236}">
-                <a16:creationId xmlns:a16="http://schemas.microsoft.com/office/drawing/2014/main" id="{970924AD-396D-52A9-865C-3D64D50DCA77}"/>
+                <a16:creationId xmlns:a16="http://schemas.microsoft.com/office/drawing/2014/main" id="{8FF8C3DD-EC8F-2D0B-6F55-F832634C3D05}"/>
               </a:ext>
             </a:extLst>
           </p:cNvPr>
@@ -2021,7 +2021,7 @@
           <p:cNvPr id="7" name="日付プレースホルダー 6">
             <a:extLst>
               <a:ext uri="{FF2B5EF4-FFF2-40B4-BE49-F238E27FC236}">
-                <a16:creationId xmlns:a16="http://schemas.microsoft.com/office/drawing/2014/main" id="{8B7305BA-9A69-3079-C929-B97C5EE24CDF}"/>
+                <a16:creationId xmlns:a16="http://schemas.microsoft.com/office/drawing/2014/main" id="{F246A297-387F-0976-ED44-5BAAB1F730D8}"/>
               </a:ext>
             </a:extLst>
           </p:cNvPr>
@@ -2037,7 +2037,7 @@
           <a:bodyPr/>
           <a:lstStyle/>
           <a:p>
-            <a:fld id="{794A3558-7951-4BA0-88B3-EADFCA56266D}" type="datetimeFigureOut">
+            <a:fld id="{4332AD03-1C48-40E9-888F-4BAB1BDD10B1}" type="datetimeFigureOut">
               <a:rPr kumimoji="1" lang="ja-JP" altLang="en-US" smtClean="0"/>
               <a:t>2026/7/30</a:t>
             </a:fld>
@@ -2050,7 +2050,7 @@
           <p:cNvPr id="8" name="フッター プレースホルダー 7">
             <a:extLst>
               <a:ext uri="{FF2B5EF4-FFF2-40B4-BE49-F238E27FC236}">
-                <a16:creationId xmlns:a16="http://schemas.microsoft.com/office/drawing/2014/main" id="{740DAC38-3138-DA6E-92B4-8C6BD195FB2A}"/>
+                <a16:creationId xmlns:a16="http://schemas.microsoft.com/office/drawing/2014/main" id="{4ADAD7FC-125F-0A2D-E560-11E82D263295}"/>
               </a:ext>
             </a:extLst>
           </p:cNvPr>
@@ -2075,7 +2075,7 @@
           <p:cNvPr id="9" name="スライド番号プレースホルダー 8">
             <a:extLst>
               <a:ext uri="{FF2B5EF4-FFF2-40B4-BE49-F238E27FC236}">
-                <a16:creationId xmlns:a16="http://schemas.microsoft.com/office/drawing/2014/main" id="{6B7C069B-3F78-F2D8-EB03-7FF1DCB2C402}"/>
+                <a16:creationId xmlns:a16="http://schemas.microsoft.com/office/drawing/2014/main" id="{362D6B7F-CD57-8FD2-9B6E-173E5895FC4C}"/>
               </a:ext>
             </a:extLst>
           </p:cNvPr>
@@ -2091,7 +2091,7 @@
           <a:bodyPr/>
           <a:lstStyle/>
           <a:p>
-            <a:fld id="{D2A9B455-F022-4DCD-AB19-4AE8DFF281BB}" type="slidenum">
+            <a:fld id="{E87B2B7F-83D0-4B6E-A23A-67B351E85F50}" type="slidenum">
               <a:rPr kumimoji="1" lang="ja-JP" altLang="en-US" smtClean="0"/>
               <a:t>‹#›</a:t>
             </a:fld>
@@ -2102,7 +2102,7 @@
     </p:spTree>
     <p:extLst>
       <p:ext uri="{BB962C8B-B14F-4D97-AF65-F5344CB8AC3E}">
-        <p14:creationId xmlns:p14="http://schemas.microsoft.com/office/powerpoint/2010/main" val="138010667"/>
+        <p14:creationId xmlns:p14="http://schemas.microsoft.com/office/powerpoint/2010/main" val="2175974028"/>
       </p:ext>
     </p:extLst>
   </p:cSld>
@@ -2134,7 +2134,7 @@
           <p:cNvPr id="2" name="タイトル 1">
             <a:extLst>
               <a:ext uri="{FF2B5EF4-FFF2-40B4-BE49-F238E27FC236}">
-                <a16:creationId xmlns:a16="http://schemas.microsoft.com/office/drawing/2014/main" id="{117E8E6C-70C6-C254-1506-51CBD49FD86A}"/>
+                <a16:creationId xmlns:a16="http://schemas.microsoft.com/office/drawing/2014/main" id="{94A8A676-0136-F526-FAF0-9C39D13DE995}"/>
               </a:ext>
             </a:extLst>
           </p:cNvPr>
@@ -2162,7 +2162,7 @@
           <p:cNvPr id="3" name="日付プレースホルダー 2">
             <a:extLst>
               <a:ext uri="{FF2B5EF4-FFF2-40B4-BE49-F238E27FC236}">
-                <a16:creationId xmlns:a16="http://schemas.microsoft.com/office/drawing/2014/main" id="{148DD5EC-908B-FCFB-2BDC-6E0F0EBCA343}"/>
+                <a16:creationId xmlns:a16="http://schemas.microsoft.com/office/drawing/2014/main" id="{04AD618B-0B28-06AA-6284-BAD736324DF5}"/>
               </a:ext>
             </a:extLst>
           </p:cNvPr>
@@ -2178,7 +2178,7 @@
           <a:bodyPr/>
           <a:lstStyle/>
           <a:p>
-            <a:fld id="{794A3558-7951-4BA0-88B3-EADFCA56266D}" type="datetimeFigureOut">
+            <a:fld id="{4332AD03-1C48-40E9-888F-4BAB1BDD10B1}" type="datetimeFigureOut">
               <a:rPr kumimoji="1" lang="ja-JP" altLang="en-US" smtClean="0"/>
               <a:t>2026/7/30</a:t>
             </a:fld>
@@ -2191,7 +2191,7 @@
           <p:cNvPr id="4" name="フッター プレースホルダー 3">
             <a:extLst>
               <a:ext uri="{FF2B5EF4-FFF2-40B4-BE49-F238E27FC236}">
-                <a16:creationId xmlns:a16="http://schemas.microsoft.com/office/drawing/2014/main" id="{67ADB008-2A45-F2B9-8352-76F3A34411E7}"/>
+                <a16:creationId xmlns:a16="http://schemas.microsoft.com/office/drawing/2014/main" id="{3140DA75-ADF3-B8D7-579F-A3AEF1C91228}"/>
               </a:ext>
             </a:extLst>
           </p:cNvPr>
@@ -2216,7 +2216,7 @@
           <p:cNvPr id="5" name="スライド番号プレースホルダー 4">
             <a:extLst>
               <a:ext uri="{FF2B5EF4-FFF2-40B4-BE49-F238E27FC236}">
-                <a16:creationId xmlns:a16="http://schemas.microsoft.com/office/drawing/2014/main" id="{E6D89244-63F3-6499-45FB-067F4EC2C284}"/>
+                <a16:creationId xmlns:a16="http://schemas.microsoft.com/office/drawing/2014/main" id="{CD84AE09-E6A1-2C64-676A-479E4DF09137}"/>
               </a:ext>
             </a:extLst>
           </p:cNvPr>
@@ -2232,7 +2232,7 @@
           <a:bodyPr/>
           <a:lstStyle/>
           <a:p>
-            <a:fld id="{D2A9B455-F022-4DCD-AB19-4AE8DFF281BB}" type="slidenum">
+            <a:fld id="{E87B2B7F-83D0-4B6E-A23A-67B351E85F50}" type="slidenum">
               <a:rPr kumimoji="1" lang="ja-JP" altLang="en-US" smtClean="0"/>
               <a:t>‹#›</a:t>
             </a:fld>
@@ -2243,7 +2243,7 @@
     </p:spTree>
     <p:extLst>
       <p:ext uri="{BB962C8B-B14F-4D97-AF65-F5344CB8AC3E}">
-        <p14:creationId xmlns:p14="http://schemas.microsoft.com/office/powerpoint/2010/main" val="423006070"/>
+        <p14:creationId xmlns:p14="http://schemas.microsoft.com/office/powerpoint/2010/main" val="3602162521"/>
       </p:ext>
     </p:extLst>
   </p:cSld>
@@ -2275,7 +2275,7 @@
           <p:cNvPr id="2" name="日付プレースホルダー 1">
             <a:extLst>
               <a:ext uri="{FF2B5EF4-FFF2-40B4-BE49-F238E27FC236}">
-                <a16:creationId xmlns:a16="http://schemas.microsoft.com/office/drawing/2014/main" id="{8149CF77-BFA1-B201-FBE1-F92664AA6DFD}"/>
+                <a16:creationId xmlns:a16="http://schemas.microsoft.com/office/drawing/2014/main" id="{48A48CAF-365B-0C27-FAC0-193292DE9BF6}"/>
               </a:ext>
             </a:extLst>
           </p:cNvPr>
@@ -2291,7 +2291,7 @@
           <a:bodyPr/>
           <a:lstStyle/>
           <a:p>
-            <a:fld id="{794A3558-7951-4BA0-88B3-EADFCA56266D}" type="datetimeFigureOut">
+            <a:fld id="{4332AD03-1C48-40E9-888F-4BAB1BDD10B1}" type="datetimeFigureOut">
               <a:rPr kumimoji="1" lang="ja-JP" altLang="en-US" smtClean="0"/>
               <a:t>2026/7/30</a:t>
             </a:fld>
@@ -2304,7 +2304,7 @@
           <p:cNvPr id="3" name="フッター プレースホルダー 2">
             <a:extLst>
               <a:ext uri="{FF2B5EF4-FFF2-40B4-BE49-F238E27FC236}">
-                <a16:creationId xmlns:a16="http://schemas.microsoft.com/office/drawing/2014/main" id="{48BD4619-E1A1-6B97-1533-EBC3E1D20FB9}"/>
+                <a16:creationId xmlns:a16="http://schemas.microsoft.com/office/drawing/2014/main" id="{AFC8E3F5-84DF-41C7-7D5F-6353E6555061}"/>
               </a:ext>
             </a:extLst>
           </p:cNvPr>
@@ -2329,7 +2329,7 @@
           <p:cNvPr id="4" name="スライド番号プレースホルダー 3">
             <a:extLst>
               <a:ext uri="{FF2B5EF4-FFF2-40B4-BE49-F238E27FC236}">
-                <a16:creationId xmlns:a16="http://schemas.microsoft.com/office/drawing/2014/main" id="{DBB8738D-CDDA-597A-CCF3-24E7CBAB27EC}"/>
+                <a16:creationId xmlns:a16="http://schemas.microsoft.com/office/drawing/2014/main" id="{DB57A8BC-FF27-1767-F0A8-E065D5EC5612}"/>
               </a:ext>
             </a:extLst>
           </p:cNvPr>
@@ -2345,7 +2345,7 @@
           <a:bodyPr/>
           <a:lstStyle/>
           <a:p>
-            <a:fld id="{D2A9B455-F022-4DCD-AB19-4AE8DFF281BB}" type="slidenum">
+            <a:fld id="{E87B2B7F-83D0-4B6E-A23A-67B351E85F50}" type="slidenum">
               <a:rPr kumimoji="1" lang="ja-JP" altLang="en-US" smtClean="0"/>
               <a:t>‹#›</a:t>
             </a:fld>
@@ -2356,7 +2356,7 @@
     </p:spTree>
     <p:extLst>
       <p:ext uri="{BB962C8B-B14F-4D97-AF65-F5344CB8AC3E}">
-        <p14:creationId xmlns:p14="http://schemas.microsoft.com/office/powerpoint/2010/main" val="1188719073"/>
+        <p14:creationId xmlns:p14="http://schemas.microsoft.com/office/powerpoint/2010/main" val="1832459633"/>
       </p:ext>
     </p:extLst>
   </p:cSld>
@@ -2388,7 +2388,7 @@
           <p:cNvPr id="2" name="タイトル 1">
             <a:extLst>
               <a:ext uri="{FF2B5EF4-FFF2-40B4-BE49-F238E27FC236}">
-                <a16:creationId xmlns:a16="http://schemas.microsoft.com/office/drawing/2014/main" id="{86787F22-9A5A-F75B-B579-BE596C3A0E78}"/>
+                <a16:creationId xmlns:a16="http://schemas.microsoft.com/office/drawing/2014/main" id="{A37E772D-3C02-9B84-21EC-7997B847A872}"/>
               </a:ext>
             </a:extLst>
           </p:cNvPr>
@@ -2425,7 +2425,7 @@
           <p:cNvPr id="3" name="コンテンツ プレースホルダー 2">
             <a:extLst>
               <a:ext uri="{FF2B5EF4-FFF2-40B4-BE49-F238E27FC236}">
-                <a16:creationId xmlns:a16="http://schemas.microsoft.com/office/drawing/2014/main" id="{09BEC2BB-E7DE-101A-BA8F-2CEC240E27B2}"/>
+                <a16:creationId xmlns:a16="http://schemas.microsoft.com/office/drawing/2014/main" id="{670EA26F-E1F7-DFD4-514E-E67022CC5788}"/>
               </a:ext>
             </a:extLst>
           </p:cNvPr>
@@ -2547,7 +2547,7 @@
           <p:cNvPr id="4" name="テキスト プレースホルダー 3">
             <a:extLst>
               <a:ext uri="{FF2B5EF4-FFF2-40B4-BE49-F238E27FC236}">
-                <a16:creationId xmlns:a16="http://schemas.microsoft.com/office/drawing/2014/main" id="{75FCA009-0532-A56F-FF60-00F6A24E8C3C}"/>
+                <a16:creationId xmlns:a16="http://schemas.microsoft.com/office/drawing/2014/main" id="{2865E65A-3A03-7359-20AC-7741596DF9E8}"/>
               </a:ext>
             </a:extLst>
           </p:cNvPr>
@@ -2618,7 +2618,7 @@
           <p:cNvPr id="5" name="日付プレースホルダー 4">
             <a:extLst>
               <a:ext uri="{FF2B5EF4-FFF2-40B4-BE49-F238E27FC236}">
-                <a16:creationId xmlns:a16="http://schemas.microsoft.com/office/drawing/2014/main" id="{6E76EA75-1FBD-157C-B9E1-7FB0281E122B}"/>
+                <a16:creationId xmlns:a16="http://schemas.microsoft.com/office/drawing/2014/main" id="{4C965425-810C-19DB-99A7-1F179BB37B64}"/>
               </a:ext>
             </a:extLst>
           </p:cNvPr>
@@ -2634,7 +2634,7 @@
           <a:bodyPr/>
           <a:lstStyle/>
           <a:p>
-            <a:fld id="{794A3558-7951-4BA0-88B3-EADFCA56266D}" type="datetimeFigureOut">
+            <a:fld id="{4332AD03-1C48-40E9-888F-4BAB1BDD10B1}" type="datetimeFigureOut">
               <a:rPr kumimoji="1" lang="ja-JP" altLang="en-US" smtClean="0"/>
               <a:t>2026/7/30</a:t>
             </a:fld>
@@ -2647,7 +2647,7 @@
           <p:cNvPr id="6" name="フッター プレースホルダー 5">
             <a:extLst>
               <a:ext uri="{FF2B5EF4-FFF2-40B4-BE49-F238E27FC236}">
-                <a16:creationId xmlns:a16="http://schemas.microsoft.com/office/drawing/2014/main" id="{DD359C5F-58D7-E41C-AD29-9199E1E7EBC1}"/>
+                <a16:creationId xmlns:a16="http://schemas.microsoft.com/office/drawing/2014/main" id="{A41A6F9B-1CF3-BF66-91D2-AF7105DE0424}"/>
               </a:ext>
             </a:extLst>
           </p:cNvPr>
@@ -2672,7 +2672,7 @@
           <p:cNvPr id="7" name="スライド番号プレースホルダー 6">
             <a:extLst>
               <a:ext uri="{FF2B5EF4-FFF2-40B4-BE49-F238E27FC236}">
-                <a16:creationId xmlns:a16="http://schemas.microsoft.com/office/drawing/2014/main" id="{23C466AC-7B92-F511-406A-0EDCA8A735F4}"/>
+                <a16:creationId xmlns:a16="http://schemas.microsoft.com/office/drawing/2014/main" id="{422A3295-04E3-F317-3B1C-27F3DED390E0}"/>
               </a:ext>
             </a:extLst>
           </p:cNvPr>
@@ -2688,7 +2688,7 @@
           <a:bodyPr/>
           <a:lstStyle/>
           <a:p>
-            <a:fld id="{D2A9B455-F022-4DCD-AB19-4AE8DFF281BB}" type="slidenum">
+            <a:fld id="{E87B2B7F-83D0-4B6E-A23A-67B351E85F50}" type="slidenum">
               <a:rPr kumimoji="1" lang="ja-JP" altLang="en-US" smtClean="0"/>
               <a:t>‹#›</a:t>
             </a:fld>
@@ -2699,7 +2699,7 @@
     </p:spTree>
     <p:extLst>
       <p:ext uri="{BB962C8B-B14F-4D97-AF65-F5344CB8AC3E}">
-        <p14:creationId xmlns:p14="http://schemas.microsoft.com/office/powerpoint/2010/main" val="1138501797"/>
+        <p14:creationId xmlns:p14="http://schemas.microsoft.com/office/powerpoint/2010/main" val="1054469163"/>
       </p:ext>
     </p:extLst>
   </p:cSld>
@@ -2731,7 +2731,7 @@
           <p:cNvPr id="2" name="タイトル 1">
             <a:extLst>
               <a:ext uri="{FF2B5EF4-FFF2-40B4-BE49-F238E27FC236}">
-                <a16:creationId xmlns:a16="http://schemas.microsoft.com/office/drawing/2014/main" id="{419353D4-C136-C501-83B1-0755C09CDB8D}"/>
+                <a16:creationId xmlns:a16="http://schemas.microsoft.com/office/drawing/2014/main" id="{30CB22A2-0DF9-CB89-7214-A60FD1C279B3}"/>
               </a:ext>
             </a:extLst>
           </p:cNvPr>
@@ -2768,7 +2768,7 @@
           <p:cNvPr id="3" name="図プレースホルダー 2">
             <a:extLst>
               <a:ext uri="{FF2B5EF4-FFF2-40B4-BE49-F238E27FC236}">
-                <a16:creationId xmlns:a16="http://schemas.microsoft.com/office/drawing/2014/main" id="{BBCB3633-39C5-B885-F9BD-7766F51500E2}"/>
+                <a16:creationId xmlns:a16="http://schemas.microsoft.com/office/drawing/2014/main" id="{FA3E7141-98E9-9691-485A-B893D8C982CD}"/>
               </a:ext>
             </a:extLst>
           </p:cNvPr>
@@ -2835,7 +2835,7 @@
           <p:cNvPr id="4" name="テキスト プレースホルダー 3">
             <a:extLst>
               <a:ext uri="{FF2B5EF4-FFF2-40B4-BE49-F238E27FC236}">
-                <a16:creationId xmlns:a16="http://schemas.microsoft.com/office/drawing/2014/main" id="{2AB2B6CD-4301-EFB5-D33D-DB9240B66D8E}"/>
+                <a16:creationId xmlns:a16="http://schemas.microsoft.com/office/drawing/2014/main" id="{FA0A4407-320F-FF55-2956-6395ED83EDF7}"/>
               </a:ext>
             </a:extLst>
           </p:cNvPr>
@@ -2906,7 +2906,7 @@
           <p:cNvPr id="5" name="日付プレースホルダー 4">
             <a:extLst>
               <a:ext uri="{FF2B5EF4-FFF2-40B4-BE49-F238E27FC236}">
-                <a16:creationId xmlns:a16="http://schemas.microsoft.com/office/drawing/2014/main" id="{629501DB-4515-F234-18AD-69D28580B0C9}"/>
+                <a16:creationId xmlns:a16="http://schemas.microsoft.com/office/drawing/2014/main" id="{52C1AE45-B7F1-7682-829F-C53A2A3C84BF}"/>
               </a:ext>
             </a:extLst>
           </p:cNvPr>
@@ -2922,7 +2922,7 @@
           <a:bodyPr/>
           <a:lstStyle/>
           <a:p>
-            <a:fld id="{794A3558-7951-4BA0-88B3-EADFCA56266D}" type="datetimeFigureOut">
+            <a:fld id="{4332AD03-1C48-40E9-888F-4BAB1BDD10B1}" type="datetimeFigureOut">
               <a:rPr kumimoji="1" lang="ja-JP" altLang="en-US" smtClean="0"/>
               <a:t>2026/7/30</a:t>
             </a:fld>
@@ -2935,7 +2935,7 @@
           <p:cNvPr id="6" name="フッター プレースホルダー 5">
             <a:extLst>
               <a:ext uri="{FF2B5EF4-FFF2-40B4-BE49-F238E27FC236}">
-                <a16:creationId xmlns:a16="http://schemas.microsoft.com/office/drawing/2014/main" id="{09BB325A-04F8-7B5A-81D1-08467735C349}"/>
+                <a16:creationId xmlns:a16="http://schemas.microsoft.com/office/drawing/2014/main" id="{6A61C658-DE34-9ECC-1390-16C035E262A7}"/>
               </a:ext>
             </a:extLst>
           </p:cNvPr>
@@ -2960,7 +2960,7 @@
           <p:cNvPr id="7" name="スライド番号プレースホルダー 6">
             <a:extLst>
               <a:ext uri="{FF2B5EF4-FFF2-40B4-BE49-F238E27FC236}">
-                <a16:creationId xmlns:a16="http://schemas.microsoft.com/office/drawing/2014/main" id="{FBAAAB81-0888-1783-3724-CD5CC1B0A5E9}"/>
+                <a16:creationId xmlns:a16="http://schemas.microsoft.com/office/drawing/2014/main" id="{3242CBFF-5F62-CA25-2D44-D39EE71E7DDE}"/>
               </a:ext>
             </a:extLst>
           </p:cNvPr>
@@ -2976,7 +2976,7 @@
           <a:bodyPr/>
           <a:lstStyle/>
           <a:p>
-            <a:fld id="{D2A9B455-F022-4DCD-AB19-4AE8DFF281BB}" type="slidenum">
+            <a:fld id="{E87B2B7F-83D0-4B6E-A23A-67B351E85F50}" type="slidenum">
               <a:rPr kumimoji="1" lang="ja-JP" altLang="en-US" smtClean="0"/>
               <a:t>‹#›</a:t>
             </a:fld>
@@ -2987,7 +2987,7 @@
     </p:spTree>
     <p:extLst>
       <p:ext uri="{BB962C8B-B14F-4D97-AF65-F5344CB8AC3E}">
-        <p14:creationId xmlns:p14="http://schemas.microsoft.com/office/powerpoint/2010/main" val="28635629"/>
+        <p14:creationId xmlns:p14="http://schemas.microsoft.com/office/powerpoint/2010/main" val="3957210327"/>
       </p:ext>
     </p:extLst>
   </p:cSld>
@@ -3024,7 +3024,7 @@
           <p:cNvPr id="2" name="タイトル プレースホルダー 1">
             <a:extLst>
               <a:ext uri="{FF2B5EF4-FFF2-40B4-BE49-F238E27FC236}">
-                <a16:creationId xmlns:a16="http://schemas.microsoft.com/office/drawing/2014/main" id="{4AF9068A-1A27-4475-28EA-C8661BF24618}"/>
+                <a16:creationId xmlns:a16="http://schemas.microsoft.com/office/drawing/2014/main" id="{0F509B2B-E5F5-E167-450D-FF51523365B4}"/>
               </a:ext>
             </a:extLst>
           </p:cNvPr>
@@ -3062,7 +3062,7 @@
           <p:cNvPr id="3" name="テキスト プレースホルダー 2">
             <a:extLst>
               <a:ext uri="{FF2B5EF4-FFF2-40B4-BE49-F238E27FC236}">
-                <a16:creationId xmlns:a16="http://schemas.microsoft.com/office/drawing/2014/main" id="{46DEC656-B41E-19B1-3888-9AC7A783508A}"/>
+                <a16:creationId xmlns:a16="http://schemas.microsoft.com/office/drawing/2014/main" id="{23287092-8606-FFDE-8DC7-98DDB6EE34F3}"/>
               </a:ext>
             </a:extLst>
           </p:cNvPr>
@@ -3161,7 +3161,7 @@
           <p:cNvPr id="4" name="日付プレースホルダー 3">
             <a:extLst>
               <a:ext uri="{FF2B5EF4-FFF2-40B4-BE49-F238E27FC236}">
-                <a16:creationId xmlns:a16="http://schemas.microsoft.com/office/drawing/2014/main" id="{22119DCD-8641-0AB7-3367-65028C141C22}"/>
+                <a16:creationId xmlns:a16="http://schemas.microsoft.com/office/drawing/2014/main" id="{3A6036F2-DC86-B3EF-8430-926B5710966C}"/>
               </a:ext>
             </a:extLst>
           </p:cNvPr>
@@ -3195,7 +3195,7 @@
             </a:lvl1pPr>
           </a:lstStyle>
           <a:p>
-            <a:fld id="{794A3558-7951-4BA0-88B3-EADFCA56266D}" type="datetimeFigureOut">
+            <a:fld id="{4332AD03-1C48-40E9-888F-4BAB1BDD10B1}" type="datetimeFigureOut">
               <a:rPr kumimoji="1" lang="ja-JP" altLang="en-US" smtClean="0"/>
               <a:t>2026/7/30</a:t>
             </a:fld>
@@ -3208,7 +3208,7 @@
           <p:cNvPr id="5" name="フッター プレースホルダー 4">
             <a:extLst>
               <a:ext uri="{FF2B5EF4-FFF2-40B4-BE49-F238E27FC236}">
-                <a16:creationId xmlns:a16="http://schemas.microsoft.com/office/drawing/2014/main" id="{39AEDC3C-1F4B-0984-DDAA-FD2775DEC939}"/>
+                <a16:creationId xmlns:a16="http://schemas.microsoft.com/office/drawing/2014/main" id="{8331EEBD-85F3-8619-170F-CA7DC15A78FC}"/>
               </a:ext>
             </a:extLst>
           </p:cNvPr>
@@ -3251,7 +3251,7 @@
           <p:cNvPr id="6" name="スライド番号プレースホルダー 5">
             <a:extLst>
               <a:ext uri="{FF2B5EF4-FFF2-40B4-BE49-F238E27FC236}">
-                <a16:creationId xmlns:a16="http://schemas.microsoft.com/office/drawing/2014/main" id="{B1496E87-F061-31C1-2BCC-FFDAECAD6F6A}"/>
+                <a16:creationId xmlns:a16="http://schemas.microsoft.com/office/drawing/2014/main" id="{6C13C8BC-4C38-E5E7-B7B2-E8C14E595EDC}"/>
               </a:ext>
             </a:extLst>
           </p:cNvPr>
@@ -3285,7 +3285,7 @@
             </a:lvl1pPr>
           </a:lstStyle>
           <a:p>
-            <a:fld id="{D2A9B455-F022-4DCD-AB19-4AE8DFF281BB}" type="slidenum">
+            <a:fld id="{E87B2B7F-83D0-4B6E-A23A-67B351E85F50}" type="slidenum">
               <a:rPr kumimoji="1" lang="ja-JP" altLang="en-US" smtClean="0"/>
               <a:t>‹#›</a:t>
             </a:fld>
@@ -3296,7 +3296,7 @@
     </p:spTree>
     <p:extLst>
       <p:ext uri="{BB962C8B-B14F-4D97-AF65-F5344CB8AC3E}">
-        <p14:creationId xmlns:p14="http://schemas.microsoft.com/office/powerpoint/2010/main" val="2715921800"/>
+        <p14:creationId xmlns:p14="http://schemas.microsoft.com/office/powerpoint/2010/main" val="2417549487"/>
       </p:ext>
     </p:extLst>
   </p:cSld>
@@ -3619,7 +3619,7 @@
           <p:cNvPr id="2" name="テキスト ボックス 1">
             <a:extLst>
               <a:ext uri="{FF2B5EF4-FFF2-40B4-BE49-F238E27FC236}">
-                <a16:creationId xmlns:a16="http://schemas.microsoft.com/office/drawing/2014/main" id="{A9E439C3-53B5-DE1A-4E75-2BE445B629E3}"/>
+                <a16:creationId xmlns:a16="http://schemas.microsoft.com/office/drawing/2014/main" id="{36208085-91D4-9D24-3C3E-D582C1E0FEAE}"/>
               </a:ext>
             </a:extLst>
           </p:cNvPr>
@@ -3665,7 +3665,7 @@
           <p:cNvPr id="3" name="テキスト ボックス 2">
             <a:extLst>
               <a:ext uri="{FF2B5EF4-FFF2-40B4-BE49-F238E27FC236}">
-                <a16:creationId xmlns:a16="http://schemas.microsoft.com/office/drawing/2014/main" id="{ADFE2C3F-ECF8-8DEB-8670-D6940D35E47C}"/>
+                <a16:creationId xmlns:a16="http://schemas.microsoft.com/office/drawing/2014/main" id="{489E8801-9ACF-6CE0-A4C2-8FE1452E6F66}"/>
               </a:ext>
             </a:extLst>
           </p:cNvPr>
@@ -3714,7 +3714,7 @@
           <p:cNvPr id="4" name="テキスト ボックス 3">
             <a:extLst>
               <a:ext uri="{FF2B5EF4-FFF2-40B4-BE49-F238E27FC236}">
-                <a16:creationId xmlns:a16="http://schemas.microsoft.com/office/drawing/2014/main" id="{6B703E94-D4FC-8018-4E73-A457EDD920CB}"/>
+                <a16:creationId xmlns:a16="http://schemas.microsoft.com/office/drawing/2014/main" id="{66275D82-5993-4F79-2C51-BEDF3BD645C8}"/>
               </a:ext>
             </a:extLst>
           </p:cNvPr>
@@ -3754,7 +3754,7 @@
           <p:cNvPr id="5" name="テキスト ボックス 4">
             <a:extLst>
               <a:ext uri="{FF2B5EF4-FFF2-40B4-BE49-F238E27FC236}">
-                <a16:creationId xmlns:a16="http://schemas.microsoft.com/office/drawing/2014/main" id="{17D06F04-36EE-954A-54C3-16C754BE8434}"/>
+                <a16:creationId xmlns:a16="http://schemas.microsoft.com/office/drawing/2014/main" id="{F602D7B4-23F6-CF19-3B1C-10310B631E17}"/>
               </a:ext>
             </a:extLst>
           </p:cNvPr>
@@ -3801,7 +3801,7 @@
             <a:hlinkClick r:id="" action="ppaction://media"/>
             <a:extLst>
               <a:ext uri="{FF2B5EF4-FFF2-40B4-BE49-F238E27FC236}">
-                <a16:creationId xmlns:a16="http://schemas.microsoft.com/office/drawing/2014/main" id="{486B3CDE-234A-9943-B51F-78681F3E98D6}"/>
+                <a16:creationId xmlns:a16="http://schemas.microsoft.com/office/drawing/2014/main" id="{D1F3FBD5-A8A2-FD60-0D93-CEF1DFCE1AE1}"/>
               </a:ext>
             </a:extLst>
           </p:cNvPr>
@@ -3836,7 +3836,7 @@
     </p:spTree>
     <p:extLst>
       <p:ext uri="{BB962C8B-B14F-4D97-AF65-F5344CB8AC3E}">
-        <p14:creationId xmlns:p14="http://schemas.microsoft.com/office/powerpoint/2010/main" val="2409047356"/>
+        <p14:creationId xmlns:p14="http://schemas.microsoft.com/office/powerpoint/2010/main" val="277414117"/>
       </p:ext>
     </p:extLst>
   </p:cSld>
@@ -3960,7 +3960,7 @@
           <p:cNvPr id="2" name="テキスト ボックス 1">
             <a:extLst>
               <a:ext uri="{FF2B5EF4-FFF2-40B4-BE49-F238E27FC236}">
-                <a16:creationId xmlns:a16="http://schemas.microsoft.com/office/drawing/2014/main" id="{A6243250-89AD-CC4B-9A8C-AC3997953DE6}"/>
+                <a16:creationId xmlns:a16="http://schemas.microsoft.com/office/drawing/2014/main" id="{E8CDB697-50F8-EFAF-5CF9-73EBEF45199C}"/>
               </a:ext>
             </a:extLst>
           </p:cNvPr>
@@ -4006,7 +4006,7 @@
           <p:cNvPr id="3" name="テキスト ボックス 2">
             <a:extLst>
               <a:ext uri="{FF2B5EF4-FFF2-40B4-BE49-F238E27FC236}">
-                <a16:creationId xmlns:a16="http://schemas.microsoft.com/office/drawing/2014/main" id="{404D56A8-0BBF-AFAB-F8F3-D75CD1040479}"/>
+                <a16:creationId xmlns:a16="http://schemas.microsoft.com/office/drawing/2014/main" id="{A08FD22D-8249-5DEA-0931-86E291A1C318}"/>
               </a:ext>
             </a:extLst>
           </p:cNvPr>
@@ -4046,7 +4046,7 @@
           <p:cNvPr id="4" name="テキスト ボックス 3">
             <a:extLst>
               <a:ext uri="{FF2B5EF4-FFF2-40B4-BE49-F238E27FC236}">
-                <a16:creationId xmlns:a16="http://schemas.microsoft.com/office/drawing/2014/main" id="{025B736D-59EF-3F1C-B525-712E982E311B}"/>
+                <a16:creationId xmlns:a16="http://schemas.microsoft.com/office/drawing/2014/main" id="{1FBDB6D9-C10A-65CF-8023-7FA8CA2EACA2}"/>
               </a:ext>
             </a:extLst>
           </p:cNvPr>
@@ -4076,14 +4076,17 @@
                 </a:solidFill>
                 <a:latin typeface="Arial" panose="020B0604020202020204" pitchFamily="34" charset="0"/>
               </a:rPr>
-              <a:t>About Laravel Laravel is a web application framework with expressive, elegant syntax</a:t>
-            </a:r>
-            <a:endParaRPr kumimoji="1" lang="ja-JP" altLang="en-US" sz="2000">
-              <a:solidFill>
-                <a:srgbClr val="333333"/>
-              </a:solidFill>
-              <a:latin typeface="Arial" panose="020B0604020202020204" pitchFamily="34" charset="0"/>
-            </a:endParaRPr>
+              <a:t>Space Map</a:t>
+            </a:r>
+            <a:r>
+              <a:rPr kumimoji="1" lang="ja-JP" altLang="en-US" sz="2000">
+                <a:solidFill>
+                  <a:srgbClr val="333333"/>
+                </a:solidFill>
+                <a:latin typeface="Arial" panose="020B0604020202020204" pitchFamily="34" charset="0"/>
+              </a:rPr>
+              <a:t>の目的、構成、実装を公開コードから確認できるプロジェクトです。</a:t>
+            </a:r>
           </a:p>
         </p:txBody>
       </p:sp>
@@ -4092,7 +4095,7 @@
           <p:cNvPr id="5" name="テキスト ボックス 4">
             <a:extLst>
               <a:ext uri="{FF2B5EF4-FFF2-40B4-BE49-F238E27FC236}">
-                <a16:creationId xmlns:a16="http://schemas.microsoft.com/office/drawing/2014/main" id="{3DD19282-AA94-F935-79ED-8333E8658347}"/>
+                <a16:creationId xmlns:a16="http://schemas.microsoft.com/office/drawing/2014/main" id="{4C68F062-F337-634A-8EFE-1919AF42AD6A}"/>
               </a:ext>
             </a:extLst>
           </p:cNvPr>
@@ -4139,7 +4142,7 @@
             <a:hlinkClick r:id="" action="ppaction://media"/>
             <a:extLst>
               <a:ext uri="{FF2B5EF4-FFF2-40B4-BE49-F238E27FC236}">
-                <a16:creationId xmlns:a16="http://schemas.microsoft.com/office/drawing/2014/main" id="{C45B898D-D0C3-3489-5FC8-FEFC1063CAED}"/>
+                <a16:creationId xmlns:a16="http://schemas.microsoft.com/office/drawing/2014/main" id="{CEC2F1D6-D41D-1223-A7A6-D5E6B11EDDF6}"/>
               </a:ext>
             </a:extLst>
           </p:cNvPr>
@@ -4174,7 +4177,7 @@
     </p:spTree>
     <p:extLst>
       <p:ext uri="{BB962C8B-B14F-4D97-AF65-F5344CB8AC3E}">
-        <p14:creationId xmlns:p14="http://schemas.microsoft.com/office/powerpoint/2010/main" val="3446590376"/>
+        <p14:creationId xmlns:p14="http://schemas.microsoft.com/office/powerpoint/2010/main" val="1108808844"/>
       </p:ext>
     </p:extLst>
   </p:cSld>
@@ -4217,7 +4220,7 @@
                                   <p:childTnLst>
                                     <p:cmd type="call" cmd="playFrom(0.0)">
                                       <p:cBhvr>
-                                        <p:cTn id="6" dur="7780" fill="hold"/>
+                                        <p:cTn id="6" dur="7121" fill="hold"/>
                                         <p:tgtEl>
                                           <p:spTgt spid="6"/>
                                         </p:tgtEl>
@@ -4298,7 +4301,7 @@
           <p:cNvPr id="2" name="テキスト ボックス 1">
             <a:extLst>
               <a:ext uri="{FF2B5EF4-FFF2-40B4-BE49-F238E27FC236}">
-                <a16:creationId xmlns:a16="http://schemas.microsoft.com/office/drawing/2014/main" id="{2D7B1DB8-CDC5-FE8A-A357-3728CEBA01AE}"/>
+                <a16:creationId xmlns:a16="http://schemas.microsoft.com/office/drawing/2014/main" id="{1B4E00D0-A1B3-E21D-3483-5517065EAD61}"/>
               </a:ext>
             </a:extLst>
           </p:cNvPr>
@@ -4344,7 +4347,7 @@
           <p:cNvPr id="3" name="テキスト ボックス 2">
             <a:extLst>
               <a:ext uri="{FF2B5EF4-FFF2-40B4-BE49-F238E27FC236}">
-                <a16:creationId xmlns:a16="http://schemas.microsoft.com/office/drawing/2014/main" id="{4AD3CF1C-400E-91CF-9B29-3DC6E15ABC3D}"/>
+                <a16:creationId xmlns:a16="http://schemas.microsoft.com/office/drawing/2014/main" id="{3385B447-82BB-B254-B695-B4301627FB49}"/>
               </a:ext>
             </a:extLst>
           </p:cNvPr>
@@ -4384,7 +4387,7 @@
           <p:cNvPr id="4" name="テキスト ボックス 3">
             <a:extLst>
               <a:ext uri="{FF2B5EF4-FFF2-40B4-BE49-F238E27FC236}">
-                <a16:creationId xmlns:a16="http://schemas.microsoft.com/office/drawing/2014/main" id="{57E924EC-3C98-CB82-8FD7-692B666519D4}"/>
+                <a16:creationId xmlns:a16="http://schemas.microsoft.com/office/drawing/2014/main" id="{00E2094F-279E-46CF-6522-96E2396BFAE8}"/>
               </a:ext>
             </a:extLst>
           </p:cNvPr>
@@ -4497,7 +4500,7 @@
           <p:cNvPr id="5" name="テキスト ボックス 4">
             <a:extLst>
               <a:ext uri="{FF2B5EF4-FFF2-40B4-BE49-F238E27FC236}">
-                <a16:creationId xmlns:a16="http://schemas.microsoft.com/office/drawing/2014/main" id="{8828833C-320F-3A7A-6117-F0D001BF92DD}"/>
+                <a16:creationId xmlns:a16="http://schemas.microsoft.com/office/drawing/2014/main" id="{30D64892-7025-90CC-A01B-C363E296EC0D}"/>
               </a:ext>
             </a:extLst>
           </p:cNvPr>
@@ -4544,7 +4547,7 @@
             <a:hlinkClick r:id="" action="ppaction://media"/>
             <a:extLst>
               <a:ext uri="{FF2B5EF4-FFF2-40B4-BE49-F238E27FC236}">
-                <a16:creationId xmlns:a16="http://schemas.microsoft.com/office/drawing/2014/main" id="{51E6DF6F-CA77-CBE1-3053-2032954F4293}"/>
+                <a16:creationId xmlns:a16="http://schemas.microsoft.com/office/drawing/2014/main" id="{AB7F111B-01CD-4FCC-73C1-58FFDC7EF66B}"/>
               </a:ext>
             </a:extLst>
           </p:cNvPr>
@@ -4579,7 +4582,7 @@
     </p:spTree>
     <p:extLst>
       <p:ext uri="{BB962C8B-B14F-4D97-AF65-F5344CB8AC3E}">
-        <p14:creationId xmlns:p14="http://schemas.microsoft.com/office/powerpoint/2010/main" val="2579425447"/>
+        <p14:creationId xmlns:p14="http://schemas.microsoft.com/office/powerpoint/2010/main" val="1371696372"/>
       </p:ext>
     </p:extLst>
   </p:cSld>
@@ -4703,7 +4706,7 @@
           <p:cNvPr id="2" name="テキスト ボックス 1">
             <a:extLst>
               <a:ext uri="{FF2B5EF4-FFF2-40B4-BE49-F238E27FC236}">
-                <a16:creationId xmlns:a16="http://schemas.microsoft.com/office/drawing/2014/main" id="{AE4D8CFB-49C7-3CB4-E0FA-1F3DB0D604DC}"/>
+                <a16:creationId xmlns:a16="http://schemas.microsoft.com/office/drawing/2014/main" id="{E28AD52A-E834-7DCA-6398-B1C8522F25B5}"/>
               </a:ext>
             </a:extLst>
           </p:cNvPr>
@@ -4749,7 +4752,7 @@
           <p:cNvPr id="3" name="テキスト ボックス 2">
             <a:extLst>
               <a:ext uri="{FF2B5EF4-FFF2-40B4-BE49-F238E27FC236}">
-                <a16:creationId xmlns:a16="http://schemas.microsoft.com/office/drawing/2014/main" id="{74C1F5E4-1322-ECC3-D55A-12C088E1A027}"/>
+                <a16:creationId xmlns:a16="http://schemas.microsoft.com/office/drawing/2014/main" id="{630B3280-3588-8B11-4B4E-AA48E29C7580}"/>
               </a:ext>
             </a:extLst>
           </p:cNvPr>
@@ -4789,7 +4792,7 @@
           <p:cNvPr id="4" name="テキスト ボックス 3">
             <a:extLst>
               <a:ext uri="{FF2B5EF4-FFF2-40B4-BE49-F238E27FC236}">
-                <a16:creationId xmlns:a16="http://schemas.microsoft.com/office/drawing/2014/main" id="{9DC9CC85-0014-3562-24C4-5441184017F6}"/>
+                <a16:creationId xmlns:a16="http://schemas.microsoft.com/office/drawing/2014/main" id="{18B47912-715C-1941-43B1-82EC346AA603}"/>
               </a:ext>
             </a:extLst>
           </p:cNvPr>
@@ -4899,7 +4902,7 @@
           <p:cNvPr id="5" name="テキスト ボックス 4">
             <a:extLst>
               <a:ext uri="{FF2B5EF4-FFF2-40B4-BE49-F238E27FC236}">
-                <a16:creationId xmlns:a16="http://schemas.microsoft.com/office/drawing/2014/main" id="{CCA8730E-B16F-F428-7F5E-F15264DD9F26}"/>
+                <a16:creationId xmlns:a16="http://schemas.microsoft.com/office/drawing/2014/main" id="{F8CB1D57-548A-2468-E886-BE83561B0513}"/>
               </a:ext>
             </a:extLst>
           </p:cNvPr>
@@ -4946,7 +4949,7 @@
             <a:hlinkClick r:id="" action="ppaction://media"/>
             <a:extLst>
               <a:ext uri="{FF2B5EF4-FFF2-40B4-BE49-F238E27FC236}">
-                <a16:creationId xmlns:a16="http://schemas.microsoft.com/office/drawing/2014/main" id="{5C59A828-92BF-84ED-024F-5DBD340A120E}"/>
+                <a16:creationId xmlns:a16="http://schemas.microsoft.com/office/drawing/2014/main" id="{40B504C2-BD26-833A-B743-929C1F10E560}"/>
               </a:ext>
             </a:extLst>
           </p:cNvPr>
@@ -4981,7 +4984,7 @@
     </p:spTree>
     <p:extLst>
       <p:ext uri="{BB962C8B-B14F-4D97-AF65-F5344CB8AC3E}">
-        <p14:creationId xmlns:p14="http://schemas.microsoft.com/office/powerpoint/2010/main" val="2173915438"/>
+        <p14:creationId xmlns:p14="http://schemas.microsoft.com/office/powerpoint/2010/main" val="1024959467"/>
       </p:ext>
     </p:extLst>
   </p:cSld>
@@ -5105,7 +5108,7 @@
           <p:cNvPr id="2" name="テキスト ボックス 1">
             <a:extLst>
               <a:ext uri="{FF2B5EF4-FFF2-40B4-BE49-F238E27FC236}">
-                <a16:creationId xmlns:a16="http://schemas.microsoft.com/office/drawing/2014/main" id="{3A509AF1-3E71-5D32-49BF-E69DF176E445}"/>
+                <a16:creationId xmlns:a16="http://schemas.microsoft.com/office/drawing/2014/main" id="{876505DF-3DBC-491E-B410-895D1E4F5FF2}"/>
               </a:ext>
             </a:extLst>
           </p:cNvPr>
@@ -5151,7 +5154,7 @@
           <p:cNvPr id="3" name="テキスト ボックス 2">
             <a:extLst>
               <a:ext uri="{FF2B5EF4-FFF2-40B4-BE49-F238E27FC236}">
-                <a16:creationId xmlns:a16="http://schemas.microsoft.com/office/drawing/2014/main" id="{BC4EE9EB-B6F4-0A86-64A0-4D0C0B59E3D0}"/>
+                <a16:creationId xmlns:a16="http://schemas.microsoft.com/office/drawing/2014/main" id="{936CA1CA-C735-625D-E78D-31E6F551B904}"/>
               </a:ext>
             </a:extLst>
           </p:cNvPr>
@@ -5191,7 +5194,7 @@
           <p:cNvPr id="4" name="テキスト ボックス 3">
             <a:extLst>
               <a:ext uri="{FF2B5EF4-FFF2-40B4-BE49-F238E27FC236}">
-                <a16:creationId xmlns:a16="http://schemas.microsoft.com/office/drawing/2014/main" id="{0746C5D4-8D4E-1299-650F-C8BD20A1CB9C}"/>
+                <a16:creationId xmlns:a16="http://schemas.microsoft.com/office/drawing/2014/main" id="{B9BC078E-B62F-ECE0-5523-337D7BF48833}"/>
               </a:ext>
             </a:extLst>
           </p:cNvPr>
@@ -5221,43 +5224,7 @@
                 </a:solidFill>
                 <a:latin typeface="Arial" panose="020B0604020202020204" pitchFamily="34" charset="0"/>
               </a:rPr>
-              <a:t>レンタルスペースマップ（地図</a:t>
-            </a:r>
-            <a:r>
-              <a:rPr kumimoji="1" lang="en-US" altLang="ja-JP" sz="2000">
-                <a:solidFill>
-                  <a:srgbClr val="333333"/>
-                </a:solidFill>
-                <a:latin typeface="Arial" panose="020B0604020202020204" pitchFamily="34" charset="0"/>
-              </a:rPr>
-              <a:t>×</a:t>
-            </a:r>
-            <a:r>
-              <a:rPr kumimoji="1" lang="ja-JP" altLang="en-US" sz="2000">
-                <a:solidFill>
-                  <a:srgbClr val="333333"/>
-                </a:solidFill>
-                <a:latin typeface="Arial" panose="020B0604020202020204" pitchFamily="34" charset="0"/>
-              </a:rPr>
-              <a:t>直前空き枠</a:t>
-            </a:r>
-            <a:r>
-              <a:rPr kumimoji="1" lang="en-US" altLang="ja-JP" sz="2000">
-                <a:solidFill>
-                  <a:srgbClr val="333333"/>
-                </a:solidFill>
-                <a:latin typeface="Arial" panose="020B0604020202020204" pitchFamily="34" charset="0"/>
-              </a:rPr>
-              <a:t>UGC×LINE</a:t>
-            </a:r>
-            <a:r>
-              <a:rPr kumimoji="1" lang="ja-JP" altLang="en-US" sz="2000">
-                <a:solidFill>
-                  <a:srgbClr val="333333"/>
-                </a:solidFill>
-                <a:latin typeface="Arial" panose="020B0604020202020204" pitchFamily="34" charset="0"/>
-              </a:rPr>
-              <a:t>通知・予約問い合わせ）を新規構築</a:t>
+              <a:t>直近のコミットでは、実装の見直しと継続的な改善が行われました。</a:t>
             </a:r>
           </a:p>
         </p:txBody>
@@ -5267,7 +5234,7 @@
           <p:cNvPr id="5" name="テキスト ボックス 4">
             <a:extLst>
               <a:ext uri="{FF2B5EF4-FFF2-40B4-BE49-F238E27FC236}">
-                <a16:creationId xmlns:a16="http://schemas.microsoft.com/office/drawing/2014/main" id="{FEE0FCCF-071A-1235-FBD6-A00F46FE6884}"/>
+                <a16:creationId xmlns:a16="http://schemas.microsoft.com/office/drawing/2014/main" id="{8CB4743E-510E-C531-AD39-73E7D1B2AA95}"/>
               </a:ext>
             </a:extLst>
           </p:cNvPr>
@@ -5314,7 +5281,7 @@
             <a:hlinkClick r:id="" action="ppaction://media"/>
             <a:extLst>
               <a:ext uri="{FF2B5EF4-FFF2-40B4-BE49-F238E27FC236}">
-                <a16:creationId xmlns:a16="http://schemas.microsoft.com/office/drawing/2014/main" id="{6DEDB93E-637B-CFB8-E889-2EA52E77358F}"/>
+                <a16:creationId xmlns:a16="http://schemas.microsoft.com/office/drawing/2014/main" id="{5B22DEB8-7B72-A56E-0BCE-8F13A3759D15}"/>
               </a:ext>
             </a:extLst>
           </p:cNvPr>
@@ -5349,7 +5316,7 @@
     </p:spTree>
     <p:extLst>
       <p:ext uri="{BB962C8B-B14F-4D97-AF65-F5344CB8AC3E}">
-        <p14:creationId xmlns:p14="http://schemas.microsoft.com/office/powerpoint/2010/main" val="3404168892"/>
+        <p14:creationId xmlns:p14="http://schemas.microsoft.com/office/powerpoint/2010/main" val="1314376186"/>
       </p:ext>
     </p:extLst>
   </p:cSld>
@@ -5358,10 +5325,10 @@
   </p:clrMapOvr>
   <mc:AlternateContent xmlns:mc="http://schemas.openxmlformats.org/markup-compatibility/2006">
     <mc:Choice xmlns:p14="http://schemas.microsoft.com/office/powerpoint/2010/main" Requires="p14">
-      <p:transition spd="slow" p14:dur="2000" advTm="13000"/>
+      <p:transition spd="slow" p14:dur="2000" advTm="7000"/>
     </mc:Choice>
     <mc:Fallback>
-      <p:transition spd="slow" advTm="13000"/>
+      <p:transition spd="slow" advTm="7000"/>
     </mc:Fallback>
   </mc:AlternateContent>
   <p:timing>
@@ -5392,7 +5359,7 @@
                                   <p:childTnLst>
                                     <p:cmd type="call" cmd="playFrom(0.0)">
                                       <p:cBhvr>
-                                        <p:cTn id="6" dur="12564" fill="hold"/>
+                                        <p:cTn id="6" dur="6076" fill="hold"/>
                                         <p:tgtEl>
                                           <p:spTgt spid="6"/>
                                         </p:tgtEl>
@@ -5473,7 +5440,7 @@
           <p:cNvPr id="2" name="テキスト ボックス 1">
             <a:extLst>
               <a:ext uri="{FF2B5EF4-FFF2-40B4-BE49-F238E27FC236}">
-                <a16:creationId xmlns:a16="http://schemas.microsoft.com/office/drawing/2014/main" id="{8D2AA4C5-F9B8-75D8-33A9-691C3D8B0D12}"/>
+                <a16:creationId xmlns:a16="http://schemas.microsoft.com/office/drawing/2014/main" id="{D1E5B914-8F66-EAA4-1C3B-CE4EC0289A3C}"/>
               </a:ext>
             </a:extLst>
           </p:cNvPr>
@@ -5519,7 +5486,7 @@
           <p:cNvPr id="3" name="テキスト ボックス 2">
             <a:extLst>
               <a:ext uri="{FF2B5EF4-FFF2-40B4-BE49-F238E27FC236}">
-                <a16:creationId xmlns:a16="http://schemas.microsoft.com/office/drawing/2014/main" id="{8C1D327F-E04E-04BE-B75D-50F8F0A05D80}"/>
+                <a16:creationId xmlns:a16="http://schemas.microsoft.com/office/drawing/2014/main" id="{D5DB90B5-25DD-DCD0-2364-E1A381974759}"/>
               </a:ext>
             </a:extLst>
           </p:cNvPr>
@@ -5559,7 +5526,7 @@
           <p:cNvPr id="4" name="テキスト ボックス 3">
             <a:extLst>
               <a:ext uri="{FF2B5EF4-FFF2-40B4-BE49-F238E27FC236}">
-                <a16:creationId xmlns:a16="http://schemas.microsoft.com/office/drawing/2014/main" id="{7FACC295-E2B2-7618-8940-F3B4F9E893E7}"/>
+                <a16:creationId xmlns:a16="http://schemas.microsoft.com/office/drawing/2014/main" id="{0519C983-352A-9554-F538-3D5D7358555B}"/>
               </a:ext>
             </a:extLst>
           </p:cNvPr>
@@ -5624,7 +5591,7 @@
           <p:cNvPr id="5" name="テキスト ボックス 4">
             <a:extLst>
               <a:ext uri="{FF2B5EF4-FFF2-40B4-BE49-F238E27FC236}">
-                <a16:creationId xmlns:a16="http://schemas.microsoft.com/office/drawing/2014/main" id="{CD2C5868-9190-84D8-F4F9-2EF547FFDFCA}"/>
+                <a16:creationId xmlns:a16="http://schemas.microsoft.com/office/drawing/2014/main" id="{773A2AA2-0E8A-C35D-3DE0-0ED4179B6FB9}"/>
               </a:ext>
             </a:extLst>
           </p:cNvPr>
@@ -5671,7 +5638,7 @@
             <a:hlinkClick r:id="" action="ppaction://media"/>
             <a:extLst>
               <a:ext uri="{FF2B5EF4-FFF2-40B4-BE49-F238E27FC236}">
-                <a16:creationId xmlns:a16="http://schemas.microsoft.com/office/drawing/2014/main" id="{171A96A9-8551-0209-D051-0BCF89C14E0F}"/>
+                <a16:creationId xmlns:a16="http://schemas.microsoft.com/office/drawing/2014/main" id="{33A251B1-AABC-5953-DF4E-C73B720EFCA9}"/>
               </a:ext>
             </a:extLst>
           </p:cNvPr>
@@ -5706,7 +5673,7 @@
     </p:spTree>
     <p:extLst>
       <p:ext uri="{BB962C8B-B14F-4D97-AF65-F5344CB8AC3E}">
-        <p14:creationId xmlns:p14="http://schemas.microsoft.com/office/powerpoint/2010/main" val="3140702136"/>
+        <p14:creationId xmlns:p14="http://schemas.microsoft.com/office/powerpoint/2010/main" val="703086675"/>
       </p:ext>
     </p:extLst>
   </p:cSld>
